--- a/08-final-submission/presentation/presentation.pptx
+++ b/08-final-submission/presentation/presentation.pptx
@@ -2048,7 +2048,7 @@
           <a:p>
             <a:r>
               <a:rPr lang="en-US" dirty="0"/>
-              <a:t>시스템은 4개 계층으로 구성됩니다. 클라이언트가 REST 요청을 보내면 API 계층이 받고, 이 계층 안에서 Rate Limiter가 전처리 단계로 등급별 한도를 확인합니다. 한도 초과면 HTTP 429로 거부되고, 통과하면 스케줄러 계층의 대기열에 들어갑니다. 스케줄러가 알고리즘에 따라 처리 순서를 결정하면 최종적으로 Ollama LLM이 응답을 생성합니다. 환경변수 하나로 4개 스케줄러를 실시간 전환할 수 있습니다.
+              <a:t>시스템은 4개 계층으로 구성됩니다. 클라이언트가 REST 요청을 보내면 API 계층이 받고, 이 계층 안에서 Rate Limiter가 전처리 단계로 등급별 한도를 확인합니다. 한도 초과면 HTTP 429로 거부되고, 통과하면 스케줄러 계층의 대기열에 들어갑니다. 스케줄러가 알고리즘에 따라 처리 순서를 결정하면 최종적으로 Ollama LLM이 응답을 생성합니다. 환경변수 하나로 4개 스케줄러를 즉시 전환할 수 있습니다.
 (발표 시간: 약 1분 30초)
 ---AI-PROMPT---
 [이 슬라이드 개선 지시]
